--- a/assets/pptx/catalog-249.pptx
+++ b/assets/pptx/catalog-249.pptx
@@ -3251,7 +3251,7 @@
                 <a:ea typeface="Ebrima"/>
                 <a:cs typeface="Ebrima"/>
               </a:rPr>
-              <a:t>እንዲህ አይነቷ ናት (3x) እውነተኛ ረዳት</a:t>
+              <a:t>እንዲህ አይነቷ ናት 3x እውነተኛ ረዳት</a:t>
             </a:r>
           </a:p>
           <a:p>
@@ -3269,7 +3269,7 @@
                 <a:ea typeface="Ebrima"/>
                 <a:cs typeface="Ebrima"/>
               </a:rPr>
-              <a:t>እንዲህ አይነቷ ናት (3x) እውነተኛ ረዳት</a:t>
+              <a:t>እንዲህ አይነቷ ናት 3x እውነተኛ ረዳት</a:t>
             </a:r>
           </a:p>
         </p:txBody>
@@ -3336,7 +3336,7 @@
                 <a:ea typeface="Ebrima"/>
                 <a:cs typeface="Ebrima"/>
               </a:rPr>
-              <a:t>ውበት ሃሰት ነው ደምግባትም (ከንቱ ነው)</a:t>
+              <a:t>ውበት ሃሰት ነው ደምግባትም ከንቱ ነው</a:t>
             </a:r>
           </a:p>
           <a:p>
@@ -3354,7 +3354,7 @@
                 <a:ea typeface="Ebrima"/>
                 <a:cs typeface="Ebrima"/>
               </a:rPr>
-              <a:t>ውበት ሃሰት ነው ደምግባትም (ከንቱ)</a:t>
+              <a:t>ውበት ሃሰት ነው ደምግባትም ከንቱ</a:t>
             </a:r>
           </a:p>
           <a:p>
@@ -3372,7 +3372,7 @@
                 <a:ea typeface="Ebrima"/>
                 <a:cs typeface="Ebrima"/>
               </a:rPr>
-              <a:t>እግዚአብሔርን የምትፈራ ሴት እርሷ ትመሰገናለች (ትመሰገናለች)</a:t>
+              <a:t>እግዚአብሔርን የምትፈራ ሴት እርሷ ትመሰገናለች ትመሰገናለች</a:t>
             </a:r>
           </a:p>
           <a:p>
@@ -3390,7 +3390,7 @@
                 <a:ea typeface="Ebrima"/>
                 <a:cs typeface="Ebrima"/>
               </a:rPr>
-              <a:t>እግዚአብሔርን የምትፈራ ሴት እርሷ ትመሰገናለች (እርሷ) (2x)</a:t>
+              <a:t>እግዚአብሔርን የምትፈራ ሴት እርሷ ትመሰገናለች እርሷ 2x</a:t>
             </a:r>
           </a:p>
           <a:p>
@@ -3408,7 +3408,7 @@
                 <a:ea typeface="Ebrima"/>
                 <a:cs typeface="Ebrima"/>
               </a:rPr>
-              <a:t>እግዚአብሔርን የምትፈራ ሴት እርሷ ትመሰገናለች (2x)</a:t>
+              <a:t>እግዚአብሔርን የምትፈራ ሴት እርሷ ትመሰገናለች 2x</a:t>
             </a:r>
           </a:p>
         </p:txBody>
@@ -3475,7 +3475,7 @@
                 <a:ea typeface="Ebrima"/>
                 <a:cs typeface="Ebrima"/>
               </a:rPr>
-              <a:t>እንዲህ አይነቷ ናት (4x) እውነተኛ ረዳት</a:t>
+              <a:t>እንዲህ አይነቷ ናት 4x እውነተኛ ረዳት</a:t>
             </a:r>
           </a:p>
           <a:p>
@@ -3493,7 +3493,7 @@
                 <a:ea typeface="Ebrima"/>
                 <a:cs typeface="Ebrima"/>
               </a:rPr>
-              <a:t>እንዲህ አይነቷ ናት (4x) እውነተኛ ረዳት</a:t>
+              <a:t>እንዲህ አይነቷ ናት 4x እውነተኛ ረዳት</a:t>
             </a:r>
           </a:p>
           <a:p>
@@ -3511,7 +3511,7 @@
                 <a:ea typeface="Ebrima"/>
                 <a:cs typeface="Ebrima"/>
               </a:rPr>
-              <a:t>እንዲህ አይነቷ ናት (4x) እውነተኛ ረዳት</a:t>
+              <a:t>እንዲህ አይነቷ ናት 4x እውነተኛ ረዳት</a:t>
             </a:r>
           </a:p>
         </p:txBody>
@@ -3820,7 +3820,7 @@
                 <a:ea typeface="Ebrima"/>
                 <a:cs typeface="Ebrima"/>
               </a:rPr>
-              <a:t>እንዲህ አይነቷ ናት (3x) እውነተኛ ረዳት</a:t>
+              <a:t>እንዲህ አይነቷ ናት 3x እውነተኛ ረዳት</a:t>
             </a:r>
           </a:p>
           <a:p>
@@ -3838,7 +3838,7 @@
                 <a:ea typeface="Ebrima"/>
                 <a:cs typeface="Ebrima"/>
               </a:rPr>
-              <a:t>እንዲህ አይነቷ ናት (3x) እውነተኛ ረዳት</a:t>
+              <a:t>እንዲህ አይነቷ ናት 3x እውነተኛ ረዳት</a:t>
             </a:r>
           </a:p>
         </p:txBody>
@@ -3959,7 +3959,7 @@
                 <a:ea typeface="Ebrima"/>
                 <a:cs typeface="Ebrima"/>
               </a:rPr>
-              <a:t>የማመዛዘን ችሎታ ሁሉ ያለው (በጣም)</a:t>
+              <a:t>የማመዛዘን ችሎታ ሁሉ ያለው በጣም</a:t>
             </a:r>
           </a:p>
           <a:p>
@@ -4098,7 +4098,7 @@
                 <a:ea typeface="Ebrima"/>
                 <a:cs typeface="Ebrima"/>
               </a:rPr>
-              <a:t>እንዲህ አይነቷ ናት (3x) እውነተኛ ረዳት</a:t>
+              <a:t>እንዲህ አይነቷ ናት 3x እውነተኛ ረዳት</a:t>
             </a:r>
           </a:p>
           <a:p>
@@ -4116,7 +4116,7 @@
                 <a:ea typeface="Ebrima"/>
                 <a:cs typeface="Ebrima"/>
               </a:rPr>
-              <a:t>እንዲህ አይነቷ ናት (3x) እውነተኛ ረዳት</a:t>
+              <a:t>እንዲህ አይነቷ ናት 3x እውነተኛ ረዳት</a:t>
             </a:r>
           </a:p>
         </p:txBody>
@@ -4376,7 +4376,7 @@
                 <a:ea typeface="Ebrima"/>
                 <a:cs typeface="Ebrima"/>
               </a:rPr>
-              <a:t>እንዲህ አይነቷ ናት (3x) እውነተኛ ረዳት</a:t>
+              <a:t>እንዲህ አይነቷ ናት 3x እውነተኛ ረዳት</a:t>
             </a:r>
           </a:p>
           <a:p>
@@ -4394,7 +4394,7 @@
                 <a:ea typeface="Ebrima"/>
                 <a:cs typeface="Ebrima"/>
               </a:rPr>
-              <a:t>እንዲህ አይነቷ ናት (3x) እውነተኛ ረዳት</a:t>
+              <a:t>እንዲህ አይነቷ ናት 3x እውነተኛ ረዳት</a:t>
             </a:r>
           </a:p>
         </p:txBody>
@@ -4461,7 +4461,7 @@
                 <a:ea typeface="Ebrima"/>
                 <a:cs typeface="Ebrima"/>
               </a:rPr>
-              <a:t>ገና ሌሊት በማለዳ ተነስታ (እንዲህ አይነቷ ናት)</a:t>
+              <a:t>ገና ሌሊት በማለዳ ተነስታ እንዲህ አይነቷ ናት</a:t>
             </a:r>
           </a:p>
           <a:p>
@@ -4479,7 +4479,7 @@
                 <a:ea typeface="Ebrima"/>
                 <a:cs typeface="Ebrima"/>
               </a:rPr>
-              <a:t>ምግብ ለቤቷ ሰዎች ሁሉ ሰርታ (እንዲህ አይነቷ ናት)</a:t>
+              <a:t>ምግብ ለቤቷ ሰዎች ሁሉ ሰርታ እንዲህ አይነቷ ናት</a:t>
             </a:r>
           </a:p>
           <a:p>
@@ -4497,7 +4497,7 @@
                 <a:ea typeface="Ebrima"/>
                 <a:cs typeface="Ebrima"/>
               </a:rPr>
-              <a:t>ወገቧን በመቀነቷ ታጥቃለች (እንዲህ አይነቷ ናት)</a:t>
+              <a:t>ወገቧን በመቀነቷ ታጥቃለች እንዲህ አይነቷ ናት</a:t>
             </a:r>
           </a:p>
           <a:p>
@@ -4515,7 +4515,7 @@
                 <a:ea typeface="Ebrima"/>
                 <a:cs typeface="Ebrima"/>
               </a:rPr>
-              <a:t>ስራዋን በጊዜው ትጨርሳለች (እንዲህ አይነቷ)</a:t>
+              <a:t>ስራዋን በጊዜው ትጨርሳለች እንዲህ አይነቷ</a:t>
             </a:r>
           </a:p>
           <a:p>
@@ -4533,7 +4533,7 @@
                 <a:ea typeface="Ebrima"/>
                 <a:cs typeface="Ebrima"/>
               </a:rPr>
-              <a:t>እንድትለፋ አይደለም እርሱ ያገባት (እንዲህ አይነቷ)</a:t>
+              <a:t>እንድትለፋ አይደለም እርሱ ያገባት እንዲህ አይነቷ</a:t>
             </a:r>
           </a:p>
           <a:p>
@@ -4551,7 +4551,7 @@
                 <a:ea typeface="Ebrima"/>
                 <a:cs typeface="Ebrima"/>
               </a:rPr>
-              <a:t>እረዳት ናት ሁሉም ነገር የገባት (እንዲህ አይነቷ ናት)</a:t>
+              <a:t>እረዳት ናት ሁሉም ነገር የገባት እንዲህ አይነቷ ናት</a:t>
             </a:r>
           </a:p>
           <a:p>
@@ -4569,7 +4569,7 @@
                 <a:ea typeface="Ebrima"/>
                 <a:cs typeface="Ebrima"/>
               </a:rPr>
-              <a:t>ሰራተኛው አይደለችም ለቤቱ (እንዲህ አይነቷ ናት)</a:t>
+              <a:t>ሰራተኛው አይደለችም ለቤቱ እንዲህ አይነቷ ናት</a:t>
             </a:r>
           </a:p>
           <a:p>
@@ -4587,7 +4587,7 @@
                 <a:ea typeface="Ebrima"/>
                 <a:cs typeface="Ebrima"/>
               </a:rPr>
-              <a:t>ናት ለባሏ ድምቀቱ ውበቱ (እንዲህ አይነቷ)</a:t>
+              <a:t>ናት ለባሏ ድምቀቱ ውበቱ እንዲህ አይነቷ</a:t>
             </a:r>
           </a:p>
         </p:txBody>
